--- a/a7/build/out/u4/A7 4.01  Slides.pptx
+++ b/a7/build/out/u4/A7 4.01  Slides.pptx
@@ -3817,7 +3817,7 @@
       </p:sp>
       <p:pic>
         <p:nvPicPr>
-          <p:cNvPr id="9" name="Picture 8" descr="2ae36fee79b20f87.png"/>
+          <p:cNvPr id="9" name="Picture 8" descr="dab37c3d4cb37ab4.png"/>
           <p:cNvPicPr>
             <a:picLocks noChangeAspect="1"/>
           </p:cNvPicPr>
@@ -3831,8 +3831,8 @@
         </p:blipFill>
         <p:spPr>
           <a:xfrm>
-            <a:off x="3453383" y="2194560"/>
-            <a:ext cx="5254752" cy="512064"/>
+            <a:off x="3451860" y="2194560"/>
+            <a:ext cx="5257800" cy="515112"/>
           </a:xfrm>
           <a:prstGeom prst="rect">
             <a:avLst/>
@@ -3847,7 +3847,7 @@
         </p:nvSpPr>
         <p:spPr>
           <a:xfrm>
-            <a:off x="777240" y="3026664"/>
+            <a:off x="777240" y="3029712"/>
             <a:ext cx="10607040" cy="429370"/>
           </a:xfrm>
           <a:prstGeom prst="rect">
@@ -4523,7 +4523,7 @@
       </p:sp>
       <p:pic>
         <p:nvPicPr>
-          <p:cNvPr id="9" name="Picture 8" descr="5104406dc1aaf70b.png"/>
+          <p:cNvPr id="9" name="Picture 8" descr="0ba903ac78fff37b.png"/>
           <p:cNvPicPr>
             <a:picLocks noChangeAspect="1"/>
           </p:cNvPicPr>
@@ -4538,7 +4538,7 @@
         <p:spPr>
           <a:xfrm>
             <a:off x="1828800" y="1920240"/>
-            <a:ext cx="3486912" cy="353568"/>
+            <a:ext cx="3483864" cy="353568"/>
           </a:xfrm>
           <a:prstGeom prst="rect">
             <a:avLst/>
@@ -4553,8 +4553,8 @@
         </p:nvSpPr>
         <p:spPr>
           <a:xfrm>
-            <a:off x="5772912" y="1868424"/>
-            <a:ext cx="5611367" cy="502920"/>
+            <a:off x="5769864" y="1868424"/>
+            <a:ext cx="5614415" cy="502920"/>
           </a:xfrm>
           <a:prstGeom prst="rect">
             <a:avLst/>
@@ -4591,7 +4591,7 @@
       </p:sp>
       <p:pic>
         <p:nvPicPr>
-          <p:cNvPr id="11" name="Picture 10" descr="1401d0e9d97ea6c9.png"/>
+          <p:cNvPr id="11" name="Picture 10" descr="aed5738787927d4f.png"/>
           <p:cNvPicPr>
             <a:picLocks noChangeAspect="1"/>
           </p:cNvPicPr>
@@ -4606,7 +4606,7 @@
         <p:spPr>
           <a:xfrm>
             <a:off x="1828800" y="2548128"/>
-            <a:ext cx="6071616" cy="414528"/>
+            <a:ext cx="6071616" cy="411480"/>
           </a:xfrm>
           <a:prstGeom prst="rect">
             <a:avLst/>
@@ -4621,7 +4621,7 @@
         </p:nvSpPr>
         <p:spPr>
           <a:xfrm>
-            <a:off x="8357616" y="2526792"/>
+            <a:off x="8357616" y="2525268"/>
             <a:ext cx="3026663" cy="502920"/>
           </a:xfrm>
           <a:prstGeom prst="rect">
@@ -4650,7 +4650,7 @@
       </p:sp>
       <p:pic>
         <p:nvPicPr>
-          <p:cNvPr id="13" name="Picture 12" descr="1fa6d8003172c6b1.png"/>
+          <p:cNvPr id="13" name="Picture 12" descr="7c3a73d2cb750c41.png"/>
           <p:cNvPicPr>
             <a:picLocks noChangeAspect="1"/>
           </p:cNvPicPr>
@@ -4664,7 +4664,7 @@
         </p:blipFill>
         <p:spPr>
           <a:xfrm>
-            <a:off x="1828800" y="3236975"/>
+            <a:off x="1828800" y="3233928"/>
             <a:ext cx="5349240" cy="338328"/>
           </a:xfrm>
           <a:prstGeom prst="rect">
@@ -4680,7 +4680,7 @@
         </p:nvSpPr>
         <p:spPr>
           <a:xfrm>
-            <a:off x="7635240" y="3177539"/>
+            <a:off x="7635240" y="3174492"/>
             <a:ext cx="3749039" cy="502920"/>
           </a:xfrm>
           <a:prstGeom prst="rect">
@@ -5303,7 +5303,7 @@
       </p:sp>
       <p:pic>
         <p:nvPicPr>
-          <p:cNvPr id="9" name="Picture 8" descr="e4f0a8415ed56967.png"/>
+          <p:cNvPr id="9" name="Picture 8" descr="6ee0cf26c6675aa8.png"/>
           <p:cNvPicPr>
             <a:picLocks noChangeAspect="1"/>
           </p:cNvPicPr>
@@ -5317,8 +5317,8 @@
         </p:blipFill>
         <p:spPr>
           <a:xfrm>
-            <a:off x="3453383" y="2194560"/>
-            <a:ext cx="5254752" cy="518160"/>
+            <a:off x="3451860" y="2194560"/>
+            <a:ext cx="5257800" cy="521207"/>
           </a:xfrm>
           <a:prstGeom prst="rect">
             <a:avLst/>
@@ -5333,7 +5333,7 @@
         </p:nvSpPr>
         <p:spPr>
           <a:xfrm>
-            <a:off x="777240" y="3032760"/>
+            <a:off x="777240" y="3035808"/>
             <a:ext cx="10607040" cy="429370"/>
           </a:xfrm>
           <a:prstGeom prst="rect">
@@ -6053,7 +6053,7 @@
       </p:sp>
       <p:pic>
         <p:nvPicPr>
-          <p:cNvPr id="9" name="Picture 8" descr="3cd7ad48ef74b5a3.png"/>
+          <p:cNvPr id="9" name="Picture 8" descr="2e4a44f0bcfa9379.png"/>
           <p:cNvPicPr>
             <a:picLocks noChangeAspect="1"/>
           </p:cNvPicPr>
@@ -6067,8 +6067,8 @@
         </p:blipFill>
         <p:spPr>
           <a:xfrm>
-            <a:off x="4172712" y="2103120"/>
-            <a:ext cx="3816095" cy="414528"/>
+            <a:off x="4171188" y="2103120"/>
+            <a:ext cx="3819144" cy="411480"/>
           </a:xfrm>
           <a:prstGeom prst="rect">
             <a:avLst/>
@@ -6083,7 +6083,7 @@
         </p:nvSpPr>
         <p:spPr>
           <a:xfrm>
-            <a:off x="1828800" y="2837687"/>
+            <a:off x="1828800" y="2834639"/>
             <a:ext cx="8503920" cy="548640"/>
           </a:xfrm>
           <a:prstGeom prst="rect">
@@ -6425,8 +6425,8 @@
         </p:nvSpPr>
         <p:spPr>
           <a:xfrm>
-            <a:off x="2286507" y="2171700"/>
-            <a:ext cx="2957576" cy="457200"/>
+            <a:off x="2526727" y="2171700"/>
+            <a:ext cx="2827724" cy="457200"/>
           </a:xfrm>
           <a:prstGeom prst="rect">
             <a:avLst/>
@@ -6435,7 +6435,7 @@
         </p:spPr>
         <p:txBody>
           <a:bodyPr wrap="none" lIns="45720" rIns="45720" tIns="18288" bIns="18288" anchor="ctr">
-            <a:spAutoFit/>
+            <a:noAutofit/>
           </a:bodyPr>
           <a:lstStyle/>
           <a:p>
@@ -6468,7 +6468,7 @@
         </p:blipFill>
         <p:spPr>
           <a:xfrm>
-            <a:off x="5106924" y="2225040"/>
+            <a:off x="5217291" y="2225040"/>
             <a:ext cx="1432560" cy="350520"/>
           </a:xfrm>
           <a:prstGeom prst="rect">
@@ -6484,8 +6484,8 @@
         </p:nvSpPr>
         <p:spPr>
           <a:xfrm>
-            <a:off x="6539484" y="2171700"/>
-            <a:ext cx="3472688" cy="457200"/>
+            <a:off x="6649851" y="2171700"/>
+            <a:ext cx="3122100" cy="457200"/>
           </a:xfrm>
           <a:prstGeom prst="rect">
             <a:avLst/>
@@ -6494,7 +6494,7 @@
         </p:spPr>
         <p:txBody>
           <a:bodyPr wrap="none" lIns="45720" rIns="45720" tIns="18288" bIns="18288" anchor="ctr">
-            <a:spAutoFit/>
+            <a:noAutofit/>
           </a:bodyPr>
           <a:lstStyle/>
           <a:p>
@@ -6519,8 +6519,8 @@
         </p:nvSpPr>
         <p:spPr>
           <a:xfrm>
-            <a:off x="1176528" y="2857500"/>
-            <a:ext cx="1068832" cy="457200"/>
+            <a:off x="1567529" y="2857500"/>
+            <a:ext cx="1014298" cy="457200"/>
           </a:xfrm>
           <a:prstGeom prst="rect">
             <a:avLst/>
@@ -6529,7 +6529,7 @@
         </p:spPr>
         <p:txBody>
           <a:bodyPr wrap="none" lIns="45720" rIns="45720" tIns="18288" bIns="18288" anchor="ctr">
-            <a:spAutoFit/>
+            <a:noAutofit/>
           </a:bodyPr>
           <a:lstStyle/>
           <a:p>
@@ -6562,7 +6562,7 @@
         </p:blipFill>
         <p:spPr>
           <a:xfrm>
-            <a:off x="2108200" y="2910840"/>
+            <a:off x="2444668" y="2910840"/>
             <a:ext cx="1420368" cy="350520"/>
           </a:xfrm>
           <a:prstGeom prst="rect">
@@ -6578,8 +6578,8 @@
         </p:nvSpPr>
         <p:spPr>
           <a:xfrm>
-            <a:off x="3528567" y="2857500"/>
-            <a:ext cx="7593584" cy="457200"/>
+            <a:off x="3865036" y="2857500"/>
+            <a:ext cx="6866114" cy="457200"/>
           </a:xfrm>
           <a:prstGeom prst="rect">
             <a:avLst/>
@@ -6588,7 +6588,7 @@
         </p:spPr>
         <p:txBody>
           <a:bodyPr wrap="none" lIns="45720" rIns="45720" tIns="18288" bIns="18288" anchor="ctr">
-            <a:spAutoFit/>
+            <a:noAutofit/>
           </a:bodyPr>
           <a:lstStyle/>
           <a:p>
@@ -6981,8 +6981,8 @@
         </p:nvSpPr>
         <p:spPr>
           <a:xfrm>
-            <a:off x="2286507" y="2080260"/>
-            <a:ext cx="2957576" cy="457200"/>
+            <a:off x="2528251" y="2080260"/>
+            <a:ext cx="2827724" cy="457200"/>
           </a:xfrm>
           <a:prstGeom prst="rect">
             <a:avLst/>
@@ -6991,7 +6991,7 @@
         </p:spPr>
         <p:txBody>
           <a:bodyPr wrap="none" lIns="45720" rIns="45720" tIns="18288" bIns="18288" anchor="ctr">
-            <a:spAutoFit/>
+            <a:noAutofit/>
           </a:bodyPr>
           <a:lstStyle/>
           <a:p>
@@ -7010,7 +7010,7 @@
       </p:sp>
       <p:pic>
         <p:nvPicPr>
-          <p:cNvPr id="10" name="Picture 9" descr="a93ebd6024c356c8.png"/>
+          <p:cNvPr id="10" name="Picture 9" descr="2964bfefdede6eab.png"/>
           <p:cNvPicPr>
             <a:picLocks noChangeAspect="1"/>
           </p:cNvPicPr>
@@ -7024,8 +7024,8 @@
         </p:blipFill>
         <p:spPr>
           <a:xfrm>
-            <a:off x="5106924" y="2133599"/>
-            <a:ext cx="1432560" cy="350520"/>
+            <a:off x="5218815" y="2132076"/>
+            <a:ext cx="1429512" cy="353568"/>
           </a:xfrm>
           <a:prstGeom prst="rect">
             <a:avLst/>
@@ -7040,8 +7040,8 @@
         </p:nvSpPr>
         <p:spPr>
           <a:xfrm>
-            <a:off x="6539484" y="2080260"/>
-            <a:ext cx="3472688" cy="457200"/>
+            <a:off x="6648327" y="2080260"/>
+            <a:ext cx="3122100" cy="457200"/>
           </a:xfrm>
           <a:prstGeom prst="rect">
             <a:avLst/>
@@ -7050,7 +7050,7 @@
         </p:spPr>
         <p:txBody>
           <a:bodyPr wrap="none" lIns="45720" rIns="45720" tIns="18288" bIns="18288" anchor="ctr">
-            <a:spAutoFit/>
+            <a:noAutofit/>
           </a:bodyPr>
           <a:lstStyle/>
           <a:p>
@@ -7075,8 +7075,8 @@
         </p:nvSpPr>
         <p:spPr>
           <a:xfrm>
-            <a:off x="1176528" y="2766060"/>
-            <a:ext cx="1068832" cy="457200"/>
+            <a:off x="1567529" y="2766060"/>
+            <a:ext cx="1014298" cy="457200"/>
           </a:xfrm>
           <a:prstGeom prst="rect">
             <a:avLst/>
@@ -7085,7 +7085,7 @@
         </p:spPr>
         <p:txBody>
           <a:bodyPr wrap="none" lIns="45720" rIns="45720" tIns="18288" bIns="18288" anchor="ctr">
-            <a:spAutoFit/>
+            <a:noAutofit/>
           </a:bodyPr>
           <a:lstStyle/>
           <a:p>
@@ -7104,7 +7104,7 @@
       </p:sp>
       <p:pic>
         <p:nvPicPr>
-          <p:cNvPr id="13" name="Picture 12" descr="ec31129b2b046b12.png"/>
+          <p:cNvPr id="13" name="Picture 12" descr="c6d077b225e06ab4.png"/>
           <p:cNvPicPr>
             <a:picLocks noChangeAspect="1"/>
           </p:cNvPicPr>
@@ -7118,8 +7118,8 @@
         </p:blipFill>
         <p:spPr>
           <a:xfrm>
-            <a:off x="2108200" y="2819399"/>
-            <a:ext cx="1420368" cy="350520"/>
+            <a:off x="2444668" y="2817876"/>
+            <a:ext cx="1420368" cy="353568"/>
           </a:xfrm>
           <a:prstGeom prst="rect">
             <a:avLst/>
@@ -7134,8 +7134,8 @@
         </p:nvSpPr>
         <p:spPr>
           <a:xfrm>
-            <a:off x="3528567" y="2766060"/>
-            <a:ext cx="7593584" cy="457200"/>
+            <a:off x="3865036" y="2766060"/>
+            <a:ext cx="6866114" cy="457200"/>
           </a:xfrm>
           <a:prstGeom prst="rect">
             <a:avLst/>
@@ -7144,7 +7144,7 @@
         </p:spPr>
         <p:txBody>
           <a:bodyPr wrap="none" lIns="45720" rIns="45720" tIns="18288" bIns="18288" anchor="ctr">
-            <a:spAutoFit/>
+            <a:noAutofit/>
           </a:bodyPr>
           <a:lstStyle/>
           <a:p>
@@ -7904,7 +7904,7 @@
         <p:spPr>
           <a:xfrm>
             <a:off x="1874519" y="1760220"/>
-            <a:ext cx="6893560" cy="457200"/>
+            <a:ext cx="5991504" cy="457200"/>
           </a:xfrm>
           <a:prstGeom prst="rect">
             <a:avLst/>
@@ -7913,7 +7913,7 @@
         </p:spPr>
         <p:txBody>
           <a:bodyPr wrap="none" lIns="45720" rIns="45720" tIns="18288" bIns="18288" anchor="ctr">
-            <a:spAutoFit/>
+            <a:noAutofit/>
           </a:bodyPr>
           <a:lstStyle/>
           <a:p>
@@ -7939,7 +7939,7 @@
         <p:spPr>
           <a:xfrm>
             <a:off x="1874519" y="2372868"/>
-            <a:ext cx="4918964" cy="457200"/>
+            <a:ext cx="4573104" cy="457200"/>
           </a:xfrm>
           <a:prstGeom prst="rect">
             <a:avLst/>
@@ -7948,7 +7948,7 @@
         </p:spPr>
         <p:txBody>
           <a:bodyPr wrap="none" lIns="45720" rIns="45720" tIns="18288" bIns="18288" anchor="ctr">
-            <a:spAutoFit/>
+            <a:noAutofit/>
           </a:bodyPr>
           <a:lstStyle/>
           <a:p>
@@ -7981,7 +7981,7 @@
         </p:blipFill>
         <p:spPr>
           <a:xfrm>
-            <a:off x="6656324" y="2461260"/>
+            <a:off x="6310464" y="2461260"/>
             <a:ext cx="890016" cy="280416"/>
           </a:xfrm>
           <a:prstGeom prst="rect">
@@ -7997,8 +7997,8 @@
         </p:nvSpPr>
         <p:spPr>
           <a:xfrm>
-            <a:off x="7546340" y="2372868"/>
-            <a:ext cx="1425448" cy="457200"/>
+            <a:off x="7200480" y="2372868"/>
+            <a:ext cx="1224116" cy="457200"/>
           </a:xfrm>
           <a:prstGeom prst="rect">
             <a:avLst/>
@@ -8007,7 +8007,7 @@
         </p:spPr>
         <p:txBody>
           <a:bodyPr wrap="none" lIns="45720" rIns="45720" tIns="18288" bIns="18288" anchor="ctr">
-            <a:spAutoFit/>
+            <a:noAutofit/>
           </a:bodyPr>
           <a:lstStyle/>
           <a:p>
@@ -8040,7 +8040,7 @@
         </p:blipFill>
         <p:spPr>
           <a:xfrm>
-            <a:off x="8834628" y="2458212"/>
+            <a:off x="8287436" y="2458212"/>
             <a:ext cx="905256" cy="286512"/>
           </a:xfrm>
           <a:prstGeom prst="rect">
@@ -8056,8 +8056,8 @@
         </p:nvSpPr>
         <p:spPr>
           <a:xfrm>
-            <a:off x="9739884" y="2372868"/>
-            <a:ext cx="514095" cy="457200"/>
+            <a:off x="9192692" y="2372868"/>
+            <a:ext cx="433854" cy="457200"/>
           </a:xfrm>
           <a:prstGeom prst="rect">
             <a:avLst/>
@@ -8066,7 +8066,7 @@
         </p:spPr>
         <p:txBody>
           <a:bodyPr wrap="none" lIns="45720" rIns="45720" tIns="18288" bIns="18288" anchor="ctr">
-            <a:spAutoFit/>
+            <a:noAutofit/>
           </a:bodyPr>
           <a:lstStyle/>
           <a:p>
@@ -8092,7 +8092,7 @@
         <p:spPr>
           <a:xfrm>
             <a:off x="1874519" y="2985516"/>
-            <a:ext cx="3551936" cy="457200"/>
+            <a:ext cx="3064939" cy="457200"/>
           </a:xfrm>
           <a:prstGeom prst="rect">
             <a:avLst/>
@@ -8101,7 +8101,7 @@
         </p:spPr>
         <p:txBody>
           <a:bodyPr wrap="none" lIns="45720" rIns="45720" tIns="18288" bIns="18288" anchor="ctr">
-            <a:spAutoFit/>
+            <a:noAutofit/>
           </a:bodyPr>
           <a:lstStyle/>
           <a:p>
@@ -8134,7 +8134,7 @@
         </p:blipFill>
         <p:spPr>
           <a:xfrm>
-            <a:off x="5289296" y="3009900"/>
+            <a:off x="4802299" y="3009900"/>
             <a:ext cx="853440" cy="408432"/>
           </a:xfrm>
           <a:prstGeom prst="rect">
@@ -8151,7 +8151,7 @@
         <p:spPr>
           <a:xfrm>
             <a:off x="1874519" y="3598164"/>
-            <a:ext cx="3248152" cy="457200"/>
+            <a:ext cx="2898925" cy="457200"/>
           </a:xfrm>
           <a:prstGeom prst="rect">
             <a:avLst/>
@@ -8160,7 +8160,7 @@
         </p:spPr>
         <p:txBody>
           <a:bodyPr wrap="none" lIns="45720" rIns="45720" tIns="18288" bIns="18288" anchor="ctr">
-            <a:spAutoFit/>
+            <a:noAutofit/>
           </a:bodyPr>
           <a:lstStyle/>
           <a:p>
@@ -8193,7 +8193,7 @@
         </p:blipFill>
         <p:spPr>
           <a:xfrm>
-            <a:off x="4985512" y="3706368"/>
+            <a:off x="4636285" y="3706368"/>
             <a:ext cx="1298448" cy="240791"/>
           </a:xfrm>
           <a:prstGeom prst="rect">
@@ -8466,7 +8466,7 @@
       </p:sp>
       <p:pic>
         <p:nvPicPr>
-          <p:cNvPr id="9" name="Picture 8" descr="01e04974dac9eb6e.png"/>
+          <p:cNvPr id="9" name="Picture 8" descr="d662bd9034d4b28e.png"/>
           <p:cNvPicPr>
             <a:picLocks noChangeAspect="1"/>
           </p:cNvPicPr>
@@ -8480,8 +8480,8 @@
         </p:blipFill>
         <p:spPr>
           <a:xfrm>
-            <a:off x="4282439" y="2103120"/>
-            <a:ext cx="3596640" cy="414528"/>
+            <a:off x="4280916" y="2103120"/>
+            <a:ext cx="3599688" cy="411480"/>
           </a:xfrm>
           <a:prstGeom prst="rect">
             <a:avLst/>
@@ -8496,7 +8496,7 @@
         </p:nvSpPr>
         <p:spPr>
           <a:xfrm>
-            <a:off x="1828800" y="2837687"/>
+            <a:off x="1828800" y="2834639"/>
             <a:ext cx="8503920" cy="548640"/>
           </a:xfrm>
           <a:prstGeom prst="rect">
@@ -9207,7 +9207,7 @@
       </p:sp>
       <p:pic>
         <p:nvPicPr>
-          <p:cNvPr id="9" name="Picture 8" descr="340f3053f5991007.png"/>
+          <p:cNvPr id="9" name="Picture 8" descr="2450f0cef92f510f.png"/>
           <p:cNvPicPr>
             <a:picLocks noChangeAspect="1"/>
           </p:cNvPicPr>
@@ -9221,8 +9221,8 @@
         </p:blipFill>
         <p:spPr>
           <a:xfrm>
-            <a:off x="4172712" y="2103120"/>
-            <a:ext cx="3816095" cy="411480"/>
+            <a:off x="4171188" y="2104643"/>
+            <a:ext cx="3819144" cy="408432"/>
           </a:xfrm>
           <a:prstGeom prst="rect">
             <a:avLst/>
@@ -9687,7 +9687,7 @@
                 </a:solidFill>
                 <a:latin typeface="Century Schoolbook"/>
               </a:rPr>
-              <a:t>3.413 × 10</a:t>
+              <a:t>4.7 × 10</a:t>
             </a:r>
             <a:r>
               <a:rPr sz="2400" b="0" i="0" baseline="30000">
@@ -9793,7 +9793,7 @@
                 </a:solidFill>
                 <a:latin typeface="Century Schoolbook"/>
               </a:rPr>
-              <a:t>4.7 × 10</a:t>
+              <a:t>3.413 × 10</a:t>
             </a:r>
             <a:r>
               <a:rPr sz="2400" b="0" i="0" baseline="30000">
@@ -10160,7 +10160,7 @@
       </p:sp>
       <p:pic>
         <p:nvPicPr>
-          <p:cNvPr id="9" name="Picture 8" descr="d60eac1f99916ea9.png"/>
+          <p:cNvPr id="9" name="Picture 8" descr="f420607bc24c708f.png"/>
           <p:cNvPicPr>
             <a:picLocks noChangeAspect="1"/>
           </p:cNvPicPr>
@@ -10174,8 +10174,8 @@
         </p:blipFill>
         <p:spPr>
           <a:xfrm>
-            <a:off x="4172712" y="2103120"/>
-            <a:ext cx="3816095" cy="414528"/>
+            <a:off x="4171188" y="2103120"/>
+            <a:ext cx="3819144" cy="411480"/>
           </a:xfrm>
           <a:prstGeom prst="rect">
             <a:avLst/>
@@ -10190,7 +10190,7 @@
         </p:nvSpPr>
         <p:spPr>
           <a:xfrm>
-            <a:off x="777240" y="2791967"/>
+            <a:off x="777240" y="2788920"/>
             <a:ext cx="10607040" cy="465151"/>
           </a:xfrm>
           <a:prstGeom prst="rect">
@@ -10225,7 +10225,7 @@
         </p:nvSpPr>
         <p:spPr>
           <a:xfrm>
-            <a:off x="1874519" y="3458287"/>
+            <a:off x="1874519" y="3455239"/>
             <a:ext cx="4572000" cy="548640"/>
           </a:xfrm>
           <a:prstGeom prst="rect">
@@ -10243,11 +10243,117 @@
             <a:r>
               <a:rPr sz="2400" b="1" i="0">
                 <a:solidFill>
+                  <a:srgbClr val="1A1A1A"/>
+                </a:solidFill>
+                <a:latin typeface="Century Schoolbook"/>
+              </a:rPr>
+              <a:t>A.   </a:t>
+            </a:r>
+            <a:r>
+              <a:rPr sz="2400" b="0" i="0">
+                <a:solidFill>
+                  <a:srgbClr val="1A1A1A"/>
+                </a:solidFill>
+                <a:latin typeface="Century Schoolbook"/>
+              </a:rPr>
+              <a:t>4.7 × 10</a:t>
+            </a:r>
+            <a:r>
+              <a:rPr sz="2400" b="0" i="0" baseline="30000">
+                <a:solidFill>
+                  <a:srgbClr val="1A1A1A"/>
+                </a:solidFill>
+                <a:latin typeface="Century Schoolbook"/>
+              </a:rPr>
+              <a:t>5</a:t>
+            </a:r>
+          </a:p>
+        </p:txBody>
+      </p:sp>
+      <p:sp>
+        <p:nvSpPr>
+          <p:cNvPr id="12" name="TextBox 11"/>
+          <p:cNvSpPr txBox="1"/>
+          <p:nvPr/>
+        </p:nvSpPr>
+        <p:spPr>
+          <a:xfrm>
+            <a:off x="6629400" y="3455239"/>
+            <a:ext cx="4572000" cy="548640"/>
+          </a:xfrm>
+          <a:prstGeom prst="rect">
+            <a:avLst/>
+          </a:prstGeom>
+          <a:noFill/>
+        </p:spPr>
+        <p:txBody>
+          <a:bodyPr wrap="square" lIns="45720" rIns="45720" tIns="18288" bIns="18288" anchor="t">
+            <a:spAutoFit/>
+          </a:bodyPr>
+          <a:lstStyle/>
+          <a:p>
+            <a:pPr algn="l"/>
+            <a:r>
+              <a:rPr sz="2400" b="1" i="0">
+                <a:solidFill>
+                  <a:srgbClr val="1A1A1A"/>
+                </a:solidFill>
+                <a:latin typeface="Century Schoolbook"/>
+              </a:rPr>
+              <a:t>B.   </a:t>
+            </a:r>
+            <a:r>
+              <a:rPr sz="2400" b="0" i="0">
+                <a:solidFill>
+                  <a:srgbClr val="1A1A1A"/>
+                </a:solidFill>
+                <a:latin typeface="Century Schoolbook"/>
+              </a:rPr>
+              <a:t>4.7 × 10</a:t>
+            </a:r>
+            <a:r>
+              <a:rPr sz="2400" b="0" i="0" baseline="30000">
+                <a:solidFill>
+                  <a:srgbClr val="1A1A1A"/>
+                </a:solidFill>
+                <a:latin typeface="Century Schoolbook"/>
+              </a:rPr>
+              <a:t>8</a:t>
+            </a:r>
+          </a:p>
+        </p:txBody>
+      </p:sp>
+      <p:sp>
+        <p:nvSpPr>
+          <p:cNvPr id="13" name="TextBox 12"/>
+          <p:cNvSpPr txBox="1"/>
+          <p:nvPr/>
+        </p:nvSpPr>
+        <p:spPr>
+          <a:xfrm>
+            <a:off x="1874519" y="4141039"/>
+            <a:ext cx="4572000" cy="548640"/>
+          </a:xfrm>
+          <a:prstGeom prst="rect">
+            <a:avLst/>
+          </a:prstGeom>
+          <a:noFill/>
+        </p:spPr>
+        <p:txBody>
+          <a:bodyPr wrap="square" lIns="45720" rIns="45720" tIns="18288" bIns="18288" anchor="t">
+            <a:spAutoFit/>
+          </a:bodyPr>
+          <a:lstStyle/>
+          <a:p>
+            <a:pPr algn="l"/>
+            <a:r>
+              <a:rPr sz="2400" b="1" i="0">
+                <a:solidFill>
                   <a:srgbClr val="9E1B32"/>
                 </a:solidFill>
                 <a:latin typeface="Century Schoolbook"/>
               </a:rPr>
-              <a:t>A.   </a:t>
+              <a:t>C.   </a:t>
             </a:r>
             <a:r>
               <a:rPr sz="2400" b="1" i="0">
@@ -10272,13 +10378,13 @@
       </p:sp>
       <p:sp>
         <p:nvSpPr>
-          <p:cNvPr id="12" name="TextBox 11"/>
-          <p:cNvSpPr txBox="1"/>
-          <p:nvPr/>
-        </p:nvSpPr>
-        <p:spPr>
-          <a:xfrm>
-            <a:off x="6629400" y="3458287"/>
+          <p:cNvPr id="14" name="TextBox 13"/>
+          <p:cNvSpPr txBox="1"/>
+          <p:nvPr/>
+        </p:nvSpPr>
+        <p:spPr>
+          <a:xfrm>
+            <a:off x="6629400" y="4141039"/>
             <a:ext cx="4572000" cy="548640"/>
           </a:xfrm>
           <a:prstGeom prst="rect">
@@ -10300,7 +10406,7 @@
                 </a:solidFill>
                 <a:latin typeface="Century Schoolbook"/>
               </a:rPr>
-              <a:t>B.   </a:t>
+              <a:t>D.   </a:t>
             </a:r>
             <a:r>
               <a:rPr sz="2400" b="0" i="0">
@@ -10309,7 +10415,7 @@
                 </a:solidFill>
                 <a:latin typeface="Century Schoolbook"/>
               </a:rPr>
-              <a:t>4.7 × 10</a:t>
+              <a:t>3.53 × 10</a:t>
             </a:r>
             <a:r>
               <a:rPr sz="2400" b="0" i="0" baseline="30000">
@@ -10318,59 +10424,6 @@
                 </a:solidFill>
                 <a:latin typeface="Century Schoolbook"/>
               </a:rPr>
-              <a:t>8</a:t>
-            </a:r>
-          </a:p>
-        </p:txBody>
-      </p:sp>
-      <p:sp>
-        <p:nvSpPr>
-          <p:cNvPr id="13" name="TextBox 12"/>
-          <p:cNvSpPr txBox="1"/>
-          <p:nvPr/>
-        </p:nvSpPr>
-        <p:spPr>
-          <a:xfrm>
-            <a:off x="1874519" y="4144087"/>
-            <a:ext cx="4572000" cy="548640"/>
-          </a:xfrm>
-          <a:prstGeom prst="rect">
-            <a:avLst/>
-          </a:prstGeom>
-          <a:noFill/>
-        </p:spPr>
-        <p:txBody>
-          <a:bodyPr wrap="square" lIns="45720" rIns="45720" tIns="18288" bIns="18288" anchor="t">
-            <a:spAutoFit/>
-          </a:bodyPr>
-          <a:lstStyle/>
-          <a:p>
-            <a:pPr algn="l"/>
-            <a:r>
-              <a:rPr sz="2400" b="1" i="0">
-                <a:solidFill>
-                  <a:srgbClr val="1A1A1A"/>
-                </a:solidFill>
-                <a:latin typeface="Century Schoolbook"/>
-              </a:rPr>
-              <a:t>C.   </a:t>
-            </a:r>
-            <a:r>
-              <a:rPr sz="2400" b="0" i="0">
-                <a:solidFill>
-                  <a:srgbClr val="1A1A1A"/>
-                </a:solidFill>
-                <a:latin typeface="Century Schoolbook"/>
-              </a:rPr>
-              <a:t>4.7 × 10</a:t>
-            </a:r>
-            <a:r>
-              <a:rPr sz="2400" b="0" i="0" baseline="30000">
-                <a:solidFill>
-                  <a:srgbClr val="1A1A1A"/>
-                </a:solidFill>
-                <a:latin typeface="Century Schoolbook"/>
-              </a:rPr>
               <a:t>5</a:t>
             </a:r>
           </a:p>
@@ -10378,66 +10431,13 @@
       </p:sp>
       <p:sp>
         <p:nvSpPr>
-          <p:cNvPr id="14" name="TextBox 13"/>
-          <p:cNvSpPr txBox="1"/>
-          <p:nvPr/>
-        </p:nvSpPr>
-        <p:spPr>
-          <a:xfrm>
-            <a:off x="6629400" y="4144087"/>
-            <a:ext cx="4572000" cy="548640"/>
-          </a:xfrm>
-          <a:prstGeom prst="rect">
-            <a:avLst/>
-          </a:prstGeom>
-          <a:noFill/>
-        </p:spPr>
-        <p:txBody>
-          <a:bodyPr wrap="square" lIns="45720" rIns="45720" tIns="18288" bIns="18288" anchor="t">
-            <a:spAutoFit/>
-          </a:bodyPr>
-          <a:lstStyle/>
-          <a:p>
-            <a:pPr algn="l"/>
-            <a:r>
-              <a:rPr sz="2400" b="1" i="0">
-                <a:solidFill>
-                  <a:srgbClr val="1A1A1A"/>
-                </a:solidFill>
-                <a:latin typeface="Century Schoolbook"/>
-              </a:rPr>
-              <a:t>D.   </a:t>
-            </a:r>
-            <a:r>
-              <a:rPr sz="2400" b="0" i="0">
-                <a:solidFill>
-                  <a:srgbClr val="1A1A1A"/>
-                </a:solidFill>
-                <a:latin typeface="Century Schoolbook"/>
-              </a:rPr>
-              <a:t>3.53 × 10</a:t>
-            </a:r>
-            <a:r>
-              <a:rPr sz="2400" b="0" i="0" baseline="30000">
-                <a:solidFill>
-                  <a:srgbClr val="1A1A1A"/>
-                </a:solidFill>
-                <a:latin typeface="Century Schoolbook"/>
-              </a:rPr>
-              <a:t>5</a:t>
-            </a:r>
-          </a:p>
-        </p:txBody>
-      </p:sp>
-      <p:sp>
-        <p:nvSpPr>
           <p:cNvPr id="15" name="TextBox 14"/>
           <p:cNvSpPr txBox="1"/>
           <p:nvPr/>
         </p:nvSpPr>
         <p:spPr>
           <a:xfrm>
-            <a:off x="777240" y="5149927"/>
+            <a:off x="777240" y="5146879"/>
             <a:ext cx="10607040" cy="548640"/>
           </a:xfrm>
           <a:prstGeom prst="rect">
@@ -10459,7 +10459,7 @@
                 </a:solidFill>
                 <a:latin typeface="Century Schoolbook"/>
               </a:rPr>
-              <a:t>Answer:   A — 3.413 × 10</a:t>
+              <a:t>Answer:   C — 3.413 × 10</a:t>
             </a:r>
             <a:r>
               <a:rPr sz="3200" b="1" i="0" baseline="30000">
@@ -10834,7 +10834,7 @@
                 </a:solidFill>
                 <a:latin typeface="Century Schoolbook"/>
               </a:rPr>
-              <a:t>1.23 × 10</a:t>
+              <a:t>12.3 × 10</a:t>
             </a:r>
             <a:r>
               <a:rPr sz="2400" b="0" i="0" baseline="30000">
@@ -10843,7 +10843,7 @@
                 </a:solidFill>
                 <a:latin typeface="Century Schoolbook"/>
               </a:rPr>
-              <a:t>7</a:t>
+              <a:t>6</a:t>
             </a:r>
           </a:p>
         </p:txBody>
@@ -10896,7 +10896,7 @@
                 </a:solidFill>
                 <a:latin typeface="Century Schoolbook"/>
               </a:rPr>
-              <a:t>6</a:t>
+              <a:t>12</a:t>
             </a:r>
           </a:p>
         </p:txBody>
@@ -10940,7 +10940,7 @@
                 </a:solidFill>
                 <a:latin typeface="Century Schoolbook"/>
               </a:rPr>
-              <a:t>12.3 × 10</a:t>
+              <a:t>1.23 × 10</a:t>
             </a:r>
             <a:r>
               <a:rPr sz="2400" b="0" i="0" baseline="30000">
@@ -10949,7 +10949,7 @@
                 </a:solidFill>
                 <a:latin typeface="Century Schoolbook"/>
               </a:rPr>
-              <a:t>12</a:t>
+              <a:t>6</a:t>
             </a:r>
           </a:p>
         </p:txBody>
@@ -11002,7 +11002,7 @@
                 </a:solidFill>
                 <a:latin typeface="Century Schoolbook"/>
               </a:rPr>
-              <a:t>6</a:t>
+              <a:t>7</a:t>
             </a:r>
           </a:p>
         </p:txBody>
@@ -11307,7 +11307,7 @@
       </p:sp>
       <p:pic>
         <p:nvPicPr>
-          <p:cNvPr id="9" name="Picture 8" descr="f600c7d1ad07bbc4.png"/>
+          <p:cNvPr id="9" name="Picture 8" descr="11c6b03d538cb705.png"/>
           <p:cNvPicPr>
             <a:picLocks noChangeAspect="1"/>
           </p:cNvPicPr>
@@ -11321,8 +11321,8 @@
         </p:blipFill>
         <p:spPr>
           <a:xfrm>
-            <a:off x="4172712" y="2103120"/>
-            <a:ext cx="3816095" cy="414528"/>
+            <a:off x="4171188" y="2103120"/>
+            <a:ext cx="3819144" cy="411480"/>
           </a:xfrm>
           <a:prstGeom prst="rect">
             <a:avLst/>
@@ -11337,7 +11337,7 @@
         </p:nvSpPr>
         <p:spPr>
           <a:xfrm>
-            <a:off x="777240" y="2791967"/>
+            <a:off x="777240" y="2788920"/>
             <a:ext cx="10607040" cy="465151"/>
           </a:xfrm>
           <a:prstGeom prst="rect">
@@ -11372,7 +11372,7 @@
         </p:nvSpPr>
         <p:spPr>
           <a:xfrm>
-            <a:off x="1874519" y="3458287"/>
+            <a:off x="1874519" y="3455239"/>
             <a:ext cx="4572000" cy="548640"/>
           </a:xfrm>
           <a:prstGeom prst="rect">
@@ -11390,11 +11390,170 @@
             <a:r>
               <a:rPr sz="2400" b="1" i="0">
                 <a:solidFill>
+                  <a:srgbClr val="1A1A1A"/>
+                </a:solidFill>
+                <a:latin typeface="Century Schoolbook"/>
+              </a:rPr>
+              <a:t>A.   </a:t>
+            </a:r>
+            <a:r>
+              <a:rPr sz="2400" b="0" i="0">
+                <a:solidFill>
+                  <a:srgbClr val="1A1A1A"/>
+                </a:solidFill>
+                <a:latin typeface="Century Schoolbook"/>
+              </a:rPr>
+              <a:t>12.3 × 10</a:t>
+            </a:r>
+            <a:r>
+              <a:rPr sz="2400" b="0" i="0" baseline="30000">
+                <a:solidFill>
+                  <a:srgbClr val="1A1A1A"/>
+                </a:solidFill>
+                <a:latin typeface="Century Schoolbook"/>
+              </a:rPr>
+              <a:t>6</a:t>
+            </a:r>
+          </a:p>
+        </p:txBody>
+      </p:sp>
+      <p:sp>
+        <p:nvSpPr>
+          <p:cNvPr id="12" name="TextBox 11"/>
+          <p:cNvSpPr txBox="1"/>
+          <p:nvPr/>
+        </p:nvSpPr>
+        <p:spPr>
+          <a:xfrm>
+            <a:off x="6629400" y="3455239"/>
+            <a:ext cx="4572000" cy="548640"/>
+          </a:xfrm>
+          <a:prstGeom prst="rect">
+            <a:avLst/>
+          </a:prstGeom>
+          <a:noFill/>
+        </p:spPr>
+        <p:txBody>
+          <a:bodyPr wrap="square" lIns="45720" rIns="45720" tIns="18288" bIns="18288" anchor="t">
+            <a:spAutoFit/>
+          </a:bodyPr>
+          <a:lstStyle/>
+          <a:p>
+            <a:pPr algn="l"/>
+            <a:r>
+              <a:rPr sz="2400" b="1" i="0">
+                <a:solidFill>
+                  <a:srgbClr val="1A1A1A"/>
+                </a:solidFill>
+                <a:latin typeface="Century Schoolbook"/>
+              </a:rPr>
+              <a:t>B.   </a:t>
+            </a:r>
+            <a:r>
+              <a:rPr sz="2400" b="0" i="0">
+                <a:solidFill>
+                  <a:srgbClr val="1A1A1A"/>
+                </a:solidFill>
+                <a:latin typeface="Century Schoolbook"/>
+              </a:rPr>
+              <a:t>12.3 × 10</a:t>
+            </a:r>
+            <a:r>
+              <a:rPr sz="2400" b="0" i="0" baseline="30000">
+                <a:solidFill>
+                  <a:srgbClr val="1A1A1A"/>
+                </a:solidFill>
+                <a:latin typeface="Century Schoolbook"/>
+              </a:rPr>
+              <a:t>12</a:t>
+            </a:r>
+          </a:p>
+        </p:txBody>
+      </p:sp>
+      <p:sp>
+        <p:nvSpPr>
+          <p:cNvPr id="13" name="TextBox 12"/>
+          <p:cNvSpPr txBox="1"/>
+          <p:nvPr/>
+        </p:nvSpPr>
+        <p:spPr>
+          <a:xfrm>
+            <a:off x="1874519" y="4141039"/>
+            <a:ext cx="4572000" cy="548640"/>
+          </a:xfrm>
+          <a:prstGeom prst="rect">
+            <a:avLst/>
+          </a:prstGeom>
+          <a:noFill/>
+        </p:spPr>
+        <p:txBody>
+          <a:bodyPr wrap="square" lIns="45720" rIns="45720" tIns="18288" bIns="18288" anchor="t">
+            <a:spAutoFit/>
+          </a:bodyPr>
+          <a:lstStyle/>
+          <a:p>
+            <a:pPr algn="l"/>
+            <a:r>
+              <a:rPr sz="2400" b="1" i="0">
+                <a:solidFill>
+                  <a:srgbClr val="1A1A1A"/>
+                </a:solidFill>
+                <a:latin typeface="Century Schoolbook"/>
+              </a:rPr>
+              <a:t>C.   </a:t>
+            </a:r>
+            <a:r>
+              <a:rPr sz="2400" b="0" i="0">
+                <a:solidFill>
+                  <a:srgbClr val="1A1A1A"/>
+                </a:solidFill>
+                <a:latin typeface="Century Schoolbook"/>
+              </a:rPr>
+              <a:t>1.23 × 10</a:t>
+            </a:r>
+            <a:r>
+              <a:rPr sz="2400" b="0" i="0" baseline="30000">
+                <a:solidFill>
+                  <a:srgbClr val="1A1A1A"/>
+                </a:solidFill>
+                <a:latin typeface="Century Schoolbook"/>
+              </a:rPr>
+              <a:t>6</a:t>
+            </a:r>
+          </a:p>
+        </p:txBody>
+      </p:sp>
+      <p:sp>
+        <p:nvSpPr>
+          <p:cNvPr id="14" name="TextBox 13"/>
+          <p:cNvSpPr txBox="1"/>
+          <p:nvPr/>
+        </p:nvSpPr>
+        <p:spPr>
+          <a:xfrm>
+            <a:off x="6629400" y="4141039"/>
+            <a:ext cx="4572000" cy="548640"/>
+          </a:xfrm>
+          <a:prstGeom prst="rect">
+            <a:avLst/>
+          </a:prstGeom>
+          <a:noFill/>
+        </p:spPr>
+        <p:txBody>
+          <a:bodyPr wrap="square" lIns="45720" rIns="45720" tIns="18288" bIns="18288" anchor="t">
+            <a:spAutoFit/>
+          </a:bodyPr>
+          <a:lstStyle/>
+          <a:p>
+            <a:pPr algn="l"/>
+            <a:r>
+              <a:rPr sz="2400" b="1" i="0">
+                <a:solidFill>
                   <a:srgbClr val="9E1B32"/>
                 </a:solidFill>
                 <a:latin typeface="Century Schoolbook"/>
               </a:rPr>
-              <a:t>A.   </a:t>
+              <a:t>D.   </a:t>
             </a:r>
             <a:r>
               <a:rPr sz="2400" b="1" i="0">
@@ -11419,172 +11578,13 @@
       </p:sp>
       <p:sp>
         <p:nvSpPr>
-          <p:cNvPr id="12" name="TextBox 11"/>
-          <p:cNvSpPr txBox="1"/>
-          <p:nvPr/>
-        </p:nvSpPr>
-        <p:spPr>
-          <a:xfrm>
-            <a:off x="6629400" y="3458287"/>
-            <a:ext cx="4572000" cy="548640"/>
-          </a:xfrm>
-          <a:prstGeom prst="rect">
-            <a:avLst/>
-          </a:prstGeom>
-          <a:noFill/>
-        </p:spPr>
-        <p:txBody>
-          <a:bodyPr wrap="square" lIns="45720" rIns="45720" tIns="18288" bIns="18288" anchor="t">
-            <a:spAutoFit/>
-          </a:bodyPr>
-          <a:lstStyle/>
-          <a:p>
-            <a:pPr algn="l"/>
-            <a:r>
-              <a:rPr sz="2400" b="1" i="0">
-                <a:solidFill>
-                  <a:srgbClr val="1A1A1A"/>
-                </a:solidFill>
-                <a:latin typeface="Century Schoolbook"/>
-              </a:rPr>
-              <a:t>B.   </a:t>
-            </a:r>
-            <a:r>
-              <a:rPr sz="2400" b="0" i="0">
-                <a:solidFill>
-                  <a:srgbClr val="1A1A1A"/>
-                </a:solidFill>
-                <a:latin typeface="Century Schoolbook"/>
-              </a:rPr>
-              <a:t>12.3 × 10</a:t>
-            </a:r>
-            <a:r>
-              <a:rPr sz="2400" b="0" i="0" baseline="30000">
-                <a:solidFill>
-                  <a:srgbClr val="1A1A1A"/>
-                </a:solidFill>
-                <a:latin typeface="Century Schoolbook"/>
-              </a:rPr>
-              <a:t>6</a:t>
-            </a:r>
-          </a:p>
-        </p:txBody>
-      </p:sp>
-      <p:sp>
-        <p:nvSpPr>
-          <p:cNvPr id="13" name="TextBox 12"/>
-          <p:cNvSpPr txBox="1"/>
-          <p:nvPr/>
-        </p:nvSpPr>
-        <p:spPr>
-          <a:xfrm>
-            <a:off x="1874519" y="4144087"/>
-            <a:ext cx="4572000" cy="548640"/>
-          </a:xfrm>
-          <a:prstGeom prst="rect">
-            <a:avLst/>
-          </a:prstGeom>
-          <a:noFill/>
-        </p:spPr>
-        <p:txBody>
-          <a:bodyPr wrap="square" lIns="45720" rIns="45720" tIns="18288" bIns="18288" anchor="t">
-            <a:spAutoFit/>
-          </a:bodyPr>
-          <a:lstStyle/>
-          <a:p>
-            <a:pPr algn="l"/>
-            <a:r>
-              <a:rPr sz="2400" b="1" i="0">
-                <a:solidFill>
-                  <a:srgbClr val="1A1A1A"/>
-                </a:solidFill>
-                <a:latin typeface="Century Schoolbook"/>
-              </a:rPr>
-              <a:t>C.   </a:t>
-            </a:r>
-            <a:r>
-              <a:rPr sz="2400" b="0" i="0">
-                <a:solidFill>
-                  <a:srgbClr val="1A1A1A"/>
-                </a:solidFill>
-                <a:latin typeface="Century Schoolbook"/>
-              </a:rPr>
-              <a:t>12.3 × 10</a:t>
-            </a:r>
-            <a:r>
-              <a:rPr sz="2400" b="0" i="0" baseline="30000">
-                <a:solidFill>
-                  <a:srgbClr val="1A1A1A"/>
-                </a:solidFill>
-                <a:latin typeface="Century Schoolbook"/>
-              </a:rPr>
-              <a:t>12</a:t>
-            </a:r>
-          </a:p>
-        </p:txBody>
-      </p:sp>
-      <p:sp>
-        <p:nvSpPr>
-          <p:cNvPr id="14" name="TextBox 13"/>
-          <p:cNvSpPr txBox="1"/>
-          <p:nvPr/>
-        </p:nvSpPr>
-        <p:spPr>
-          <a:xfrm>
-            <a:off x="6629400" y="4144087"/>
-            <a:ext cx="4572000" cy="548640"/>
-          </a:xfrm>
-          <a:prstGeom prst="rect">
-            <a:avLst/>
-          </a:prstGeom>
-          <a:noFill/>
-        </p:spPr>
-        <p:txBody>
-          <a:bodyPr wrap="square" lIns="45720" rIns="45720" tIns="18288" bIns="18288" anchor="t">
-            <a:spAutoFit/>
-          </a:bodyPr>
-          <a:lstStyle/>
-          <a:p>
-            <a:pPr algn="l"/>
-            <a:r>
-              <a:rPr sz="2400" b="1" i="0">
-                <a:solidFill>
-                  <a:srgbClr val="1A1A1A"/>
-                </a:solidFill>
-                <a:latin typeface="Century Schoolbook"/>
-              </a:rPr>
-              <a:t>D.   </a:t>
-            </a:r>
-            <a:r>
-              <a:rPr sz="2400" b="0" i="0">
-                <a:solidFill>
-                  <a:srgbClr val="1A1A1A"/>
-                </a:solidFill>
-                <a:latin typeface="Century Schoolbook"/>
-              </a:rPr>
-              <a:t>1.23 × 10</a:t>
-            </a:r>
-            <a:r>
-              <a:rPr sz="2400" b="0" i="0" baseline="30000">
-                <a:solidFill>
-                  <a:srgbClr val="1A1A1A"/>
-                </a:solidFill>
-                <a:latin typeface="Century Schoolbook"/>
-              </a:rPr>
-              <a:t>6</a:t>
-            </a:r>
-          </a:p>
-        </p:txBody>
-      </p:sp>
-      <p:sp>
-        <p:nvSpPr>
           <p:cNvPr id="15" name="TextBox 14"/>
           <p:cNvSpPr txBox="1"/>
           <p:nvPr/>
         </p:nvSpPr>
         <p:spPr>
           <a:xfrm>
-            <a:off x="777240" y="5149927"/>
+            <a:off x="777240" y="5146879"/>
             <a:ext cx="10607040" cy="548640"/>
           </a:xfrm>
           <a:prstGeom prst="rect">
@@ -11606,7 +11606,7 @@
                 </a:solidFill>
                 <a:latin typeface="Century Schoolbook"/>
               </a:rPr>
-              <a:t>Answer:   A — 1.23 × 10</a:t>
+              <a:t>Answer:   D — 1.23 × 10</a:t>
             </a:r>
             <a:r>
               <a:rPr sz="3200" b="1" i="0" baseline="30000">
@@ -12242,7 +12242,7 @@
       </p:sp>
       <p:pic>
         <p:nvPicPr>
-          <p:cNvPr id="9" name="Picture 8" descr="7996c8675edf5172.png"/>
+          <p:cNvPr id="9" name="Picture 8" descr="0150b4a7c88f61cf.png"/>
           <p:cNvPicPr>
             <a:picLocks noChangeAspect="1"/>
           </p:cNvPicPr>
@@ -12256,8 +12256,8 @@
         </p:blipFill>
         <p:spPr>
           <a:xfrm>
-            <a:off x="3977639" y="2103120"/>
-            <a:ext cx="4206240" cy="411480"/>
+            <a:off x="3976115" y="2104643"/>
+            <a:ext cx="4209288" cy="408432"/>
           </a:xfrm>
           <a:prstGeom prst="rect">
             <a:avLst/>
@@ -12665,8 +12665,8 @@
         </p:nvSpPr>
         <p:spPr>
           <a:xfrm>
-            <a:off x="3937000" y="2860547"/>
-            <a:ext cx="3816096" cy="457200"/>
+            <a:off x="4117100" y="2860547"/>
+            <a:ext cx="3546626" cy="457200"/>
           </a:xfrm>
           <a:prstGeom prst="rect">
             <a:avLst/>
@@ -12675,7 +12675,7 @@
         </p:spPr>
         <p:txBody>
           <a:bodyPr wrap="none" lIns="45720" rIns="45720" tIns="18288" bIns="18288" anchor="ctr">
-            <a:spAutoFit/>
+            <a:noAutofit/>
           </a:bodyPr>
           <a:lstStyle/>
           <a:p>
@@ -12708,7 +12708,7 @@
         </p:blipFill>
         <p:spPr>
           <a:xfrm>
-            <a:off x="7615936" y="2997707"/>
+            <a:off x="7526567" y="2997707"/>
             <a:ext cx="192024" cy="182880"/>
           </a:xfrm>
           <a:prstGeom prst="rect">
@@ -12724,8 +12724,8 @@
         </p:nvSpPr>
         <p:spPr>
           <a:xfrm>
-            <a:off x="7807960" y="2860547"/>
-            <a:ext cx="553720" cy="457200"/>
+            <a:off x="7718591" y="2860547"/>
+            <a:ext cx="462987" cy="457200"/>
           </a:xfrm>
           <a:prstGeom prst="rect">
             <a:avLst/>
@@ -12734,7 +12734,7 @@
         </p:spPr>
         <p:txBody>
           <a:bodyPr wrap="none" lIns="45720" rIns="45720" tIns="18288" bIns="18288" anchor="ctr">
-            <a:spAutoFit/>
+            <a:noAutofit/>
           </a:bodyPr>
           <a:lstStyle/>
           <a:p>
@@ -13111,7 +13111,7 @@
         <p:spPr>
           <a:xfrm>
             <a:off x="1874519" y="1760220"/>
-            <a:ext cx="6893560" cy="457200"/>
+            <a:ext cx="5991504" cy="457200"/>
           </a:xfrm>
           <a:prstGeom prst="rect">
             <a:avLst/>
@@ -13120,7 +13120,7 @@
         </p:spPr>
         <p:txBody>
           <a:bodyPr wrap="none" lIns="45720" rIns="45720" tIns="18288" bIns="18288" anchor="ctr">
-            <a:spAutoFit/>
+            <a:noAutofit/>
           </a:bodyPr>
           <a:lstStyle/>
           <a:p>
@@ -13145,8 +13145,8 @@
         </p:nvSpPr>
         <p:spPr>
           <a:xfrm>
-            <a:off x="9179560" y="1760220"/>
-            <a:ext cx="1904492" cy="457200"/>
+            <a:off x="8277504" y="1760220"/>
+            <a:ext cx="1546152" cy="457200"/>
           </a:xfrm>
           <a:prstGeom prst="rect">
             <a:avLst/>
@@ -13155,7 +13155,7 @@
         </p:spPr>
         <p:txBody>
           <a:bodyPr wrap="none" lIns="45720" rIns="45720" tIns="18288" bIns="18288" anchor="ctr">
-            <a:spAutoFit/>
+            <a:noAutofit/>
           </a:bodyPr>
           <a:lstStyle/>
           <a:p>
@@ -13190,7 +13190,7 @@
         <p:spPr>
           <a:xfrm>
             <a:off x="1874519" y="2372868"/>
-            <a:ext cx="4918964" cy="457200"/>
+            <a:ext cx="4573104" cy="457200"/>
           </a:xfrm>
           <a:prstGeom prst="rect">
             <a:avLst/>
@@ -13199,7 +13199,7 @@
         </p:spPr>
         <p:txBody>
           <a:bodyPr wrap="none" lIns="45720" rIns="45720" tIns="18288" bIns="18288" anchor="ctr">
-            <a:spAutoFit/>
+            <a:noAutofit/>
           </a:bodyPr>
           <a:lstStyle/>
           <a:p>
@@ -13232,7 +13232,7 @@
         </p:blipFill>
         <p:spPr>
           <a:xfrm>
-            <a:off x="6656324" y="2461260"/>
+            <a:off x="6310464" y="2461260"/>
             <a:ext cx="890016" cy="280416"/>
           </a:xfrm>
           <a:prstGeom prst="rect">
@@ -13248,8 +13248,8 @@
         </p:nvSpPr>
         <p:spPr>
           <a:xfrm>
-            <a:off x="7546340" y="2372868"/>
-            <a:ext cx="1425448" cy="457200"/>
+            <a:off x="7200480" y="2372868"/>
+            <a:ext cx="1224116" cy="457200"/>
           </a:xfrm>
           <a:prstGeom prst="rect">
             <a:avLst/>
@@ -13258,7 +13258,7 @@
         </p:spPr>
         <p:txBody>
           <a:bodyPr wrap="none" lIns="45720" rIns="45720" tIns="18288" bIns="18288" anchor="ctr">
-            <a:spAutoFit/>
+            <a:noAutofit/>
           </a:bodyPr>
           <a:lstStyle/>
           <a:p>
@@ -13291,7 +13291,7 @@
         </p:blipFill>
         <p:spPr>
           <a:xfrm>
-            <a:off x="8834628" y="2458212"/>
+            <a:off x="8287436" y="2458212"/>
             <a:ext cx="905256" cy="286512"/>
           </a:xfrm>
           <a:prstGeom prst="rect">
@@ -13307,8 +13307,8 @@
         </p:nvSpPr>
         <p:spPr>
           <a:xfrm>
-            <a:off x="9739884" y="2372868"/>
-            <a:ext cx="514095" cy="457200"/>
+            <a:off x="9192692" y="2372868"/>
+            <a:ext cx="433854" cy="457200"/>
           </a:xfrm>
           <a:prstGeom prst="rect">
             <a:avLst/>
@@ -13317,7 +13317,7 @@
         </p:spPr>
         <p:txBody>
           <a:bodyPr wrap="none" lIns="45720" rIns="45720" tIns="18288" bIns="18288" anchor="ctr">
-            <a:spAutoFit/>
+            <a:noAutofit/>
           </a:bodyPr>
           <a:lstStyle/>
           <a:p>
@@ -13342,8 +13342,8 @@
         </p:nvSpPr>
         <p:spPr>
           <a:xfrm>
-            <a:off x="2606040" y="2830068"/>
-            <a:ext cx="1057402" cy="457200"/>
+            <a:off x="10038027" y="2372868"/>
+            <a:ext cx="1007357" cy="457200"/>
           </a:xfrm>
           <a:prstGeom prst="rect">
             <a:avLst/>
@@ -13352,7 +13352,7 @@
         </p:spPr>
         <p:txBody>
           <a:bodyPr wrap="none" lIns="45720" rIns="45720" tIns="18288" bIns="18288" anchor="ctr">
-            <a:spAutoFit/>
+            <a:noAutofit/>
           </a:bodyPr>
           <a:lstStyle/>
           <a:p>
@@ -13377,8 +13377,8 @@
         </p:nvSpPr>
         <p:spPr>
           <a:xfrm>
-            <a:off x="1874519" y="3442716"/>
-            <a:ext cx="3551936" cy="457200"/>
+            <a:off x="1874519" y="2985516"/>
+            <a:ext cx="3064939" cy="457200"/>
           </a:xfrm>
           <a:prstGeom prst="rect">
             <a:avLst/>
@@ -13387,7 +13387,7 @@
         </p:spPr>
         <p:txBody>
           <a:bodyPr wrap="none" lIns="45720" rIns="45720" tIns="18288" bIns="18288" anchor="ctr">
-            <a:spAutoFit/>
+            <a:noAutofit/>
           </a:bodyPr>
           <a:lstStyle/>
           <a:p>
@@ -13420,7 +13420,7 @@
         </p:blipFill>
         <p:spPr>
           <a:xfrm>
-            <a:off x="5289296" y="3467100"/>
+            <a:off x="4802299" y="3009900"/>
             <a:ext cx="853440" cy="408432"/>
           </a:xfrm>
           <a:prstGeom prst="rect">
@@ -13436,8 +13436,8 @@
         </p:nvSpPr>
         <p:spPr>
           <a:xfrm>
-            <a:off x="6691376" y="3442716"/>
-            <a:ext cx="549148" cy="457200"/>
+            <a:off x="6204379" y="2985516"/>
+            <a:ext cx="565792" cy="457200"/>
           </a:xfrm>
           <a:prstGeom prst="rect">
             <a:avLst/>
@@ -13446,7 +13446,7 @@
         </p:spPr>
         <p:txBody>
           <a:bodyPr wrap="none" lIns="45720" rIns="45720" tIns="18288" bIns="18288" anchor="ctr">
-            <a:spAutoFit/>
+            <a:noAutofit/>
           </a:bodyPr>
           <a:lstStyle/>
           <a:p>
@@ -13471,8 +13471,8 @@
         </p:nvSpPr>
         <p:spPr>
           <a:xfrm>
-            <a:off x="1874519" y="4055363"/>
-            <a:ext cx="3248152" cy="457200"/>
+            <a:off x="1874519" y="3598164"/>
+            <a:ext cx="2898925" cy="457200"/>
           </a:xfrm>
           <a:prstGeom prst="rect">
             <a:avLst/>
@@ -13481,7 +13481,7 @@
         </p:spPr>
         <p:txBody>
           <a:bodyPr wrap="none" lIns="45720" rIns="45720" tIns="18288" bIns="18288" anchor="ctr">
-            <a:spAutoFit/>
+            <a:noAutofit/>
           </a:bodyPr>
           <a:lstStyle/>
           <a:p>
@@ -13514,7 +13514,7 @@
         </p:blipFill>
         <p:spPr>
           <a:xfrm>
-            <a:off x="4985512" y="4163568"/>
+            <a:off x="4636285" y="3706368"/>
             <a:ext cx="1298448" cy="240791"/>
           </a:xfrm>
           <a:prstGeom prst="rect">
@@ -13530,8 +13530,8 @@
         </p:nvSpPr>
         <p:spPr>
           <a:xfrm>
-            <a:off x="6832600" y="4055363"/>
-            <a:ext cx="887983" cy="457200"/>
+            <a:off x="6483373" y="3598164"/>
+            <a:ext cx="821886" cy="457200"/>
           </a:xfrm>
           <a:prstGeom prst="rect">
             <a:avLst/>
@@ -13540,7 +13540,7 @@
         </p:spPr>
         <p:txBody>
           <a:bodyPr wrap="none" lIns="45720" rIns="45720" tIns="18288" bIns="18288" anchor="ctr">
-            <a:spAutoFit/>
+            <a:noAutofit/>
           </a:bodyPr>
           <a:lstStyle/>
           <a:p>
@@ -13822,7 +13822,7 @@
       </p:sp>
       <p:pic>
         <p:nvPicPr>
-          <p:cNvPr id="9" name="Picture 8" descr="cbd13eb8faf9a4ef.png"/>
+          <p:cNvPr id="9" name="Picture 8" descr="98fdf47dd4ead5bf.png"/>
           <p:cNvPicPr>
             <a:picLocks noChangeAspect="1"/>
           </p:cNvPicPr>
@@ -13836,8 +13836,8 @@
         </p:blipFill>
         <p:spPr>
           <a:xfrm>
-            <a:off x="3302507" y="2103120"/>
-            <a:ext cx="5556504" cy="414528"/>
+            <a:off x="3300984" y="2103120"/>
+            <a:ext cx="5559552" cy="411480"/>
           </a:xfrm>
           <a:prstGeom prst="rect">
             <a:avLst/>
@@ -13852,8 +13852,8 @@
         </p:nvSpPr>
         <p:spPr>
           <a:xfrm>
-            <a:off x="3937000" y="2769107"/>
-            <a:ext cx="3816096" cy="457200"/>
+            <a:off x="4117100" y="2766060"/>
+            <a:ext cx="3546626" cy="457200"/>
           </a:xfrm>
           <a:prstGeom prst="rect">
             <a:avLst/>
@@ -13862,7 +13862,7 @@
         </p:spPr>
         <p:txBody>
           <a:bodyPr wrap="none" lIns="45720" rIns="45720" tIns="18288" bIns="18288" anchor="ctr">
-            <a:spAutoFit/>
+            <a:noAutofit/>
           </a:bodyPr>
           <a:lstStyle/>
           <a:p>
@@ -13895,7 +13895,7 @@
         </p:blipFill>
         <p:spPr>
           <a:xfrm>
-            <a:off x="7615936" y="2906267"/>
+            <a:off x="7526567" y="2903220"/>
             <a:ext cx="192024" cy="182880"/>
           </a:xfrm>
           <a:prstGeom prst="rect">
@@ -13911,8 +13911,8 @@
         </p:nvSpPr>
         <p:spPr>
           <a:xfrm>
-            <a:off x="7807960" y="2769107"/>
-            <a:ext cx="553720" cy="457200"/>
+            <a:off x="7718591" y="2766060"/>
+            <a:ext cx="462987" cy="457200"/>
           </a:xfrm>
           <a:prstGeom prst="rect">
             <a:avLst/>
@@ -13921,7 +13921,7 @@
         </p:spPr>
         <p:txBody>
           <a:bodyPr wrap="none" lIns="45720" rIns="45720" tIns="18288" bIns="18288" anchor="ctr">
-            <a:spAutoFit/>
+            <a:noAutofit/>
           </a:bodyPr>
           <a:lstStyle/>
           <a:p>
@@ -13946,7 +13946,7 @@
         </p:nvSpPr>
         <p:spPr>
           <a:xfrm>
-            <a:off x="1828800" y="3523487"/>
+            <a:off x="1828800" y="3520439"/>
             <a:ext cx="8503920" cy="548640"/>
           </a:xfrm>
           <a:prstGeom prst="rect">
@@ -14306,8 +14306,8 @@
         </p:nvSpPr>
         <p:spPr>
           <a:xfrm>
-            <a:off x="1891284" y="2173224"/>
-            <a:ext cx="2614168" cy="457200"/>
+            <a:off x="1973846" y="2173224"/>
+            <a:ext cx="2523462" cy="457200"/>
           </a:xfrm>
           <a:prstGeom prst="rect">
             <a:avLst/>
@@ -14316,7 +14316,7 @@
         </p:spPr>
         <p:txBody>
           <a:bodyPr wrap="none" lIns="45720" rIns="45720" tIns="18288" bIns="18288" anchor="ctr">
-            <a:spAutoFit/>
+            <a:noAutofit/>
           </a:bodyPr>
           <a:lstStyle/>
           <a:p>
@@ -14349,7 +14349,7 @@
         </p:blipFill>
         <p:spPr>
           <a:xfrm>
-            <a:off x="4368292" y="2194560"/>
+            <a:off x="4360149" y="2194560"/>
             <a:ext cx="5657088" cy="414528"/>
           </a:xfrm>
           <a:prstGeom prst="rect">
@@ -14365,8 +14365,8 @@
         </p:nvSpPr>
         <p:spPr>
           <a:xfrm>
-            <a:off x="10025380" y="2173224"/>
-            <a:ext cx="382016" cy="457200"/>
+            <a:off x="10017237" y="2173224"/>
+            <a:ext cx="307595" cy="457200"/>
           </a:xfrm>
           <a:prstGeom prst="rect">
             <a:avLst/>
@@ -14375,7 +14375,7 @@
         </p:spPr>
         <p:txBody>
           <a:bodyPr wrap="none" lIns="45720" rIns="45720" tIns="18288" bIns="18288" anchor="ctr">
-            <a:spAutoFit/>
+            <a:noAutofit/>
           </a:bodyPr>
           <a:lstStyle/>
           <a:p>
@@ -14768,8 +14768,8 @@
         </p:nvSpPr>
         <p:spPr>
           <a:xfrm>
-            <a:off x="1891284" y="2081783"/>
-            <a:ext cx="2614168" cy="457200"/>
+            <a:off x="1972322" y="2080260"/>
+            <a:ext cx="2523462" cy="457200"/>
           </a:xfrm>
           <a:prstGeom prst="rect">
             <a:avLst/>
@@ -14778,7 +14778,7 @@
         </p:spPr>
         <p:txBody>
           <a:bodyPr wrap="none" lIns="45720" rIns="45720" tIns="18288" bIns="18288" anchor="ctr">
-            <a:spAutoFit/>
+            <a:noAutofit/>
           </a:bodyPr>
           <a:lstStyle/>
           <a:p>
@@ -14797,7 +14797,7 @@
       </p:sp>
       <p:pic>
         <p:nvPicPr>
-          <p:cNvPr id="10" name="Picture 9" descr="82e722a216f1ae2f.png"/>
+          <p:cNvPr id="10" name="Picture 9" descr="6a5bd63b1555e627.png"/>
           <p:cNvPicPr>
             <a:picLocks noChangeAspect="1"/>
           </p:cNvPicPr>
@@ -14811,8 +14811,8 @@
         </p:blipFill>
         <p:spPr>
           <a:xfrm>
-            <a:off x="4368292" y="2103120"/>
-            <a:ext cx="5657088" cy="414528"/>
+            <a:off x="4358625" y="2103120"/>
+            <a:ext cx="5660136" cy="411480"/>
           </a:xfrm>
           <a:prstGeom prst="rect">
             <a:avLst/>
@@ -14827,8 +14827,8 @@
         </p:nvSpPr>
         <p:spPr>
           <a:xfrm>
-            <a:off x="10025380" y="2081783"/>
-            <a:ext cx="382016" cy="457200"/>
+            <a:off x="10018761" y="2080260"/>
+            <a:ext cx="307595" cy="457200"/>
           </a:xfrm>
           <a:prstGeom prst="rect">
             <a:avLst/>
@@ -14837,7 +14837,7 @@
         </p:spPr>
         <p:txBody>
           <a:bodyPr wrap="none" lIns="45720" rIns="45720" tIns="18288" bIns="18288" anchor="ctr">
-            <a:spAutoFit/>
+            <a:noAutofit/>
           </a:bodyPr>
           <a:lstStyle/>
           <a:p>
@@ -14862,7 +14862,7 @@
         </p:nvSpPr>
         <p:spPr>
           <a:xfrm>
-            <a:off x="777240" y="2791967"/>
+            <a:off x="777240" y="2788920"/>
             <a:ext cx="10607040" cy="465151"/>
           </a:xfrm>
           <a:prstGeom prst="rect">
@@ -14897,7 +14897,7 @@
         </p:nvSpPr>
         <p:spPr>
           <a:xfrm>
-            <a:off x="1828800" y="3412567"/>
+            <a:off x="1828800" y="3409519"/>
             <a:ext cx="8503920" cy="548640"/>
           </a:xfrm>
           <a:prstGeom prst="rect">
@@ -16763,7 +16763,7 @@
       </p:graphicFrame>
       <p:pic>
         <p:nvPicPr>
-          <p:cNvPr id="12" name="Picture 11" descr="bbfa79e578c1bcfd.png"/>
+          <p:cNvPr id="12" name="Picture 11" descr="f39e13154060a858.png"/>
           <p:cNvPicPr>
             <a:picLocks noChangeAspect="1"/>
           </p:cNvPicPr>
@@ -16787,7 +16787,7 @@
       </p:pic>
       <p:pic>
         <p:nvPicPr>
-          <p:cNvPr id="13" name="Picture 12" descr="9ff30f06d7f01d4d.png"/>
+          <p:cNvPr id="13" name="Picture 12" descr="09bdd4fb91237775.png"/>
           <p:cNvPicPr>
             <a:picLocks noChangeAspect="1"/>
           </p:cNvPicPr>
@@ -16801,8 +16801,8 @@
         </p:blipFill>
         <p:spPr>
           <a:xfrm>
-            <a:off x="1979675" y="4049267"/>
-            <a:ext cx="8202168" cy="359664"/>
+            <a:off x="1979675" y="4050791"/>
+            <a:ext cx="8202168" cy="356616"/>
           </a:xfrm>
           <a:prstGeom prst="rect">
             <a:avLst/>
@@ -17144,7 +17144,7 @@
       </p:cxnSp>
       <p:pic>
         <p:nvPicPr>
-          <p:cNvPr id="10" name="Picture 9" descr="4f6c226d06735b9a.png"/>
+          <p:cNvPr id="10" name="Picture 9" descr="6f1eddec5041a22d.png"/>
           <p:cNvPicPr>
             <a:picLocks noChangeAspect="1"/>
           </p:cNvPicPr>
@@ -17158,8 +17158,8 @@
         </p:blipFill>
         <p:spPr>
           <a:xfrm>
-            <a:off x="3249168" y="2340864"/>
-            <a:ext cx="5663184" cy="414528"/>
+            <a:off x="3247644" y="2340864"/>
+            <a:ext cx="5666232" cy="411480"/>
           </a:xfrm>
           <a:prstGeom prst="rect">
             <a:avLst/>
@@ -17168,7 +17168,7 @@
       </p:pic>
       <p:pic>
         <p:nvPicPr>
-          <p:cNvPr id="11" name="Picture 10" descr="9b82ecd7b67495dd.png"/>
+          <p:cNvPr id="11" name="Picture 10" descr="84f16e9d72a5cae0.png"/>
           <p:cNvPicPr>
             <a:picLocks noChangeAspect="1"/>
           </p:cNvPicPr>
@@ -17182,8 +17182,8 @@
         </p:blipFill>
         <p:spPr>
           <a:xfrm>
-            <a:off x="2290572" y="3029711"/>
-            <a:ext cx="7580375" cy="411480"/>
+            <a:off x="2289048" y="3028188"/>
+            <a:ext cx="7583424" cy="408432"/>
           </a:xfrm>
           <a:prstGeom prst="rect">
             <a:avLst/>
@@ -17198,7 +17198,7 @@
         </p:nvSpPr>
         <p:spPr>
           <a:xfrm>
-            <a:off x="987552" y="3779520"/>
+            <a:off x="987552" y="3776472"/>
             <a:ext cx="10131551" cy="475488"/>
           </a:xfrm>
           <a:prstGeom prst="rect">
@@ -17233,7 +17233,7 @@
         </p:nvSpPr>
         <p:spPr>
           <a:xfrm>
-            <a:off x="987552" y="4511040"/>
+            <a:off x="987552" y="4507992"/>
             <a:ext cx="10131551" cy="950976"/>
           </a:xfrm>
           <a:prstGeom prst="rect">
@@ -17560,7 +17560,7 @@
       </p:cxnSp>
       <p:pic>
         <p:nvPicPr>
-          <p:cNvPr id="10" name="Picture 9" descr="2d6fbc773b8152b4.png"/>
+          <p:cNvPr id="10" name="Picture 9" descr="efa01ffb8792c249.png"/>
           <p:cNvPicPr>
             <a:picLocks noChangeAspect="1"/>
           </p:cNvPicPr>
@@ -17574,8 +17574,8 @@
         </p:blipFill>
         <p:spPr>
           <a:xfrm>
-            <a:off x="4172712" y="2340864"/>
-            <a:ext cx="3816095" cy="414528"/>
+            <a:off x="4171188" y="2340864"/>
+            <a:ext cx="3819144" cy="411480"/>
           </a:xfrm>
           <a:prstGeom prst="rect">
             <a:avLst/>
@@ -17584,7 +17584,7 @@
       </p:pic>
       <p:pic>
         <p:nvPicPr>
-          <p:cNvPr id="11" name="Picture 10" descr="1c7540b1a6b4a5e4.png"/>
+          <p:cNvPr id="11" name="Picture 10" descr="cfbb3562680e8519.png"/>
           <p:cNvPicPr>
             <a:picLocks noChangeAspect="1"/>
           </p:cNvPicPr>
@@ -17598,8 +17598,8 @@
         </p:blipFill>
         <p:spPr>
           <a:xfrm>
-            <a:off x="2677668" y="3029711"/>
-            <a:ext cx="6806184" cy="414528"/>
+            <a:off x="2677668" y="3026664"/>
+            <a:ext cx="6806184" cy="411480"/>
           </a:xfrm>
           <a:prstGeom prst="rect">
             <a:avLst/>
@@ -17608,7 +17608,7 @@
       </p:pic>
       <p:pic>
         <p:nvPicPr>
-          <p:cNvPr id="12" name="Picture 11" descr="825d9ae5f625f16e.png"/>
+          <p:cNvPr id="12" name="Picture 11" descr="783fbc1bfea8bc09.png"/>
           <p:cNvPicPr>
             <a:picLocks noChangeAspect="1"/>
           </p:cNvPicPr>
@@ -17622,8 +17622,8 @@
         </p:blipFill>
         <p:spPr>
           <a:xfrm>
-            <a:off x="1185163" y="3718560"/>
-            <a:ext cx="6062472" cy="414528"/>
+            <a:off x="1466359" y="3712464"/>
+            <a:ext cx="6065520" cy="411480"/>
           </a:xfrm>
           <a:prstGeom prst="rect">
             <a:avLst/>
@@ -17638,8 +17638,8 @@
         </p:nvSpPr>
         <p:spPr>
           <a:xfrm>
-            <a:off x="7247635" y="3697223"/>
-            <a:ext cx="2442464" cy="457200"/>
+            <a:off x="7531879" y="3689604"/>
+            <a:ext cx="1880073" cy="457200"/>
           </a:xfrm>
           <a:prstGeom prst="rect">
             <a:avLst/>
@@ -17648,7 +17648,7 @@
         </p:spPr>
         <p:txBody>
           <a:bodyPr wrap="none" lIns="45720" rIns="45720" tIns="18288" bIns="18288" anchor="ctr">
-            <a:spAutoFit/>
+            <a:noAutofit/>
           </a:bodyPr>
           <a:lstStyle/>
           <a:p>
@@ -17667,7 +17667,7 @@
       </p:sp>
       <p:pic>
         <p:nvPicPr>
-          <p:cNvPr id="14" name="Picture 13" descr="f343a03614d42048.png"/>
+          <p:cNvPr id="14" name="Picture 13" descr="23b08f458fe34abb.png"/>
           <p:cNvPicPr>
             <a:picLocks noChangeAspect="1"/>
           </p:cNvPicPr>
@@ -17681,8 +17681,8 @@
         </p:blipFill>
         <p:spPr>
           <a:xfrm>
-            <a:off x="9552939" y="3750564"/>
-            <a:ext cx="1423416" cy="350520"/>
+            <a:off x="9274792" y="3742944"/>
+            <a:ext cx="1420368" cy="350520"/>
           </a:xfrm>
           <a:prstGeom prst="rect">
             <a:avLst/>
@@ -17697,7 +17697,7 @@
         </p:nvSpPr>
         <p:spPr>
           <a:xfrm>
-            <a:off x="987552" y="4471416"/>
+            <a:off x="987552" y="4462272"/>
             <a:ext cx="10131551" cy="950976"/>
           </a:xfrm>
           <a:prstGeom prst="rect">
@@ -17732,7 +17732,7 @@
         </p:nvSpPr>
         <p:spPr>
           <a:xfrm>
-            <a:off x="987552" y="5678424"/>
+            <a:off x="987552" y="5669280"/>
             <a:ext cx="10131551" cy="475488"/>
           </a:xfrm>
           <a:prstGeom prst="rect">
@@ -18346,7 +18346,7 @@
       </p:sp>
       <p:pic>
         <p:nvPicPr>
-          <p:cNvPr id="9" name="Picture 8" descr="0ae1a71b0a56e818.png"/>
+          <p:cNvPr id="9" name="Picture 8" descr="78e26f3a087b33fd.png"/>
           <p:cNvPicPr>
             <a:picLocks noChangeAspect="1"/>
           </p:cNvPicPr>
@@ -18361,7 +18361,7 @@
         <p:spPr>
           <a:xfrm>
             <a:off x="1828800" y="1920240"/>
-            <a:ext cx="5861304" cy="405384"/>
+            <a:ext cx="5864352" cy="402336"/>
           </a:xfrm>
           <a:prstGeom prst="rect">
             <a:avLst/>
@@ -18376,8 +18376,8 @@
         </p:nvSpPr>
         <p:spPr>
           <a:xfrm>
-            <a:off x="8147304" y="1894332"/>
-            <a:ext cx="3236975" cy="502920"/>
+            <a:off x="8150352" y="1892808"/>
+            <a:ext cx="3233927" cy="502920"/>
           </a:xfrm>
           <a:prstGeom prst="rect">
             <a:avLst/>
@@ -18405,7 +18405,7 @@
       </p:sp>
       <p:pic>
         <p:nvPicPr>
-          <p:cNvPr id="11" name="Picture 10" descr="572ca34214197296.png"/>
+          <p:cNvPr id="11" name="Picture 10" descr="1cb28e2e28999fa1.png"/>
           <p:cNvPicPr>
             <a:picLocks noChangeAspect="1"/>
           </p:cNvPicPr>
@@ -18419,7 +18419,7 @@
         </p:blipFill>
         <p:spPr>
           <a:xfrm>
-            <a:off x="1828800" y="2599944"/>
+            <a:off x="1828800" y="2596896"/>
             <a:ext cx="3642360" cy="350520"/>
           </a:xfrm>
           <a:prstGeom prst="rect">
@@ -18435,7 +18435,7 @@
         </p:nvSpPr>
         <p:spPr>
           <a:xfrm>
-            <a:off x="5928360" y="2546604"/>
+            <a:off x="5928360" y="2543556"/>
             <a:ext cx="5455919" cy="502920"/>
           </a:xfrm>
           <a:prstGeom prst="rect">
@@ -18464,7 +18464,7 @@
       </p:sp>
       <p:pic>
         <p:nvPicPr>
-          <p:cNvPr id="13" name="Picture 12" descr="381484e91c5c03fc.png"/>
+          <p:cNvPr id="13" name="Picture 12" descr="ce53c7f1db8afdc0.png"/>
           <p:cNvPicPr>
             <a:picLocks noChangeAspect="1"/>
           </p:cNvPicPr>
@@ -18478,8 +18478,8 @@
         </p:blipFill>
         <p:spPr>
           <a:xfrm>
-            <a:off x="1828800" y="3224783"/>
-            <a:ext cx="1981199" cy="335280"/>
+            <a:off x="1828800" y="3221735"/>
+            <a:ext cx="1978152" cy="335280"/>
           </a:xfrm>
           <a:prstGeom prst="rect">
             <a:avLst/>
@@ -18494,7 +18494,7 @@
         </p:nvSpPr>
         <p:spPr>
           <a:xfrm>
-            <a:off x="4267199" y="3163823"/>
+            <a:off x="4264152" y="3160775"/>
             <a:ext cx="6400800" cy="502920"/>
           </a:xfrm>
           <a:prstGeom prst="rect">

--- a/a7/build/out/u4/A7 4.01  Slides.pptx
+++ b/a7/build/out/u4/A7 4.01  Slides.pptx
@@ -6425,8 +6425,8 @@
         </p:nvSpPr>
         <p:spPr>
           <a:xfrm>
-            <a:off x="2526727" y="2171700"/>
-            <a:ext cx="2827724" cy="457200"/>
+            <a:off x="1234440" y="1851660"/>
+            <a:ext cx="2626425" cy="457200"/>
           </a:xfrm>
           <a:prstGeom prst="rect">
             <a:avLst/>
@@ -6441,7 +6441,7 @@
           <a:p>
             <a:pPr algn="l"/>
             <a:r>
-              <a:rPr sz="2600" b="0" i="0">
+              <a:rPr sz="2400" b="0" i="0">
                 <a:solidFill>
                   <a:srgbClr val="1A1A1A"/>
                 </a:solidFill>
@@ -6454,7 +6454,7 @@
       </p:sp>
       <p:pic>
         <p:nvPicPr>
-          <p:cNvPr id="10" name="Picture 9" descr="a93ebd6024c356c8.png"/>
+          <p:cNvPr id="10" name="Picture 9" descr="3a4ce939f4597d0f.png"/>
           <p:cNvPicPr>
             <a:picLocks noChangeAspect="1"/>
           </p:cNvPicPr>
@@ -6468,8 +6468,8 @@
         </p:blipFill>
         <p:spPr>
           <a:xfrm>
-            <a:off x="5217291" y="2225040"/>
-            <a:ext cx="1432560" cy="350520"/>
+            <a:off x="3723705" y="1937003"/>
+            <a:ext cx="1161288" cy="286512"/>
           </a:xfrm>
           <a:prstGeom prst="rect">
             <a:avLst/>
@@ -6484,8 +6484,8 @@
         </p:nvSpPr>
         <p:spPr>
           <a:xfrm>
-            <a:off x="6649851" y="2171700"/>
-            <a:ext cx="3122100" cy="457200"/>
+            <a:off x="4884993" y="1851660"/>
+            <a:ext cx="2897979" cy="457200"/>
           </a:xfrm>
           <a:prstGeom prst="rect">
             <a:avLst/>
@@ -6500,7 +6500,7 @@
           <a:p>
             <a:pPr algn="l"/>
             <a:r>
-              <a:rPr sz="2600" b="0" i="0">
+              <a:rPr sz="2400" b="0" i="0">
                 <a:solidFill>
                   <a:srgbClr val="1A1A1A"/>
                 </a:solidFill>
@@ -6519,8 +6519,8 @@
         </p:nvSpPr>
         <p:spPr>
           <a:xfrm>
-            <a:off x="1567529" y="2857500"/>
-            <a:ext cx="1014298" cy="457200"/>
+            <a:off x="1234440" y="2464308"/>
+            <a:ext cx="952457" cy="457200"/>
           </a:xfrm>
           <a:prstGeom prst="rect">
             <a:avLst/>
@@ -6535,7 +6535,7 @@
           <a:p>
             <a:pPr algn="l"/>
             <a:r>
-              <a:rPr sz="2600" b="0" i="0">
+              <a:rPr sz="2400" b="0" i="0">
                 <a:solidFill>
                   <a:srgbClr val="1A1A1A"/>
                 </a:solidFill>
@@ -6548,7 +6548,7 @@
       </p:sp>
       <p:pic>
         <p:nvPicPr>
-          <p:cNvPr id="13" name="Picture 12" descr="ec31129b2b046b12.png"/>
+          <p:cNvPr id="13" name="Picture 12" descr="cf4775b41686db4b.png"/>
           <p:cNvPicPr>
             <a:picLocks noChangeAspect="1"/>
           </p:cNvPicPr>
@@ -6562,8 +6562,8 @@
         </p:blipFill>
         <p:spPr>
           <a:xfrm>
-            <a:off x="2444668" y="2910840"/>
-            <a:ext cx="1420368" cy="350520"/>
+            <a:off x="2049737" y="2549652"/>
+            <a:ext cx="1152144" cy="286512"/>
           </a:xfrm>
           <a:prstGeom prst="rect">
             <a:avLst/>
@@ -6578,8 +6578,8 @@
         </p:nvSpPr>
         <p:spPr>
           <a:xfrm>
-            <a:off x="3865036" y="2857500"/>
-            <a:ext cx="6866114" cy="457200"/>
+            <a:off x="3201881" y="2464308"/>
+            <a:ext cx="6354084" cy="457200"/>
           </a:xfrm>
           <a:prstGeom prst="rect">
             <a:avLst/>
@@ -6594,7 +6594,7 @@
           <a:p>
             <a:pPr algn="l"/>
             <a:r>
-              <a:rPr sz="2600" b="0" i="0">
+              <a:rPr sz="2400" b="0" i="0">
                 <a:solidFill>
                   <a:srgbClr val="1A1A1A"/>
                 </a:solidFill>
@@ -6613,23 +6613,23 @@
         </p:nvSpPr>
         <p:spPr>
           <a:xfrm>
-            <a:off x="777240" y="3566160"/>
-            <a:ext cx="10607040" cy="465151"/>
-          </a:xfrm>
-          <a:prstGeom prst="rect">
-            <a:avLst/>
-          </a:prstGeom>
-          <a:noFill/>
-        </p:spPr>
-        <p:txBody>
-          <a:bodyPr wrap="square" lIns="45720" rIns="45720" tIns="18288" bIns="18288" anchor="t">
-            <a:spAutoFit/>
-          </a:bodyPr>
-          <a:lstStyle/>
-          <a:p>
-            <a:pPr algn="ctr"/>
-            <a:r>
-              <a:rPr sz="2600" b="0" i="0">
+            <a:off x="1234440" y="3099816"/>
+            <a:ext cx="10058400" cy="429370"/>
+          </a:xfrm>
+          <a:prstGeom prst="rect">
+            <a:avLst/>
+          </a:prstGeom>
+          <a:noFill/>
+        </p:spPr>
+        <p:txBody>
+          <a:bodyPr wrap="square" lIns="45720" rIns="45720" tIns="18288" bIns="18288" anchor="t">
+            <a:spAutoFit/>
+          </a:bodyPr>
+          <a:lstStyle/>
+          <a:p>
+            <a:pPr algn="l"/>
+            <a:r>
+              <a:rPr sz="2400" b="1" i="0">
                 <a:solidFill>
                   <a:srgbClr val="1A1A1A"/>
                 </a:solidFill>
@@ -6671,41 +6671,6 @@
                 <a:latin typeface="Century Schoolbook"/>
               </a:rPr>
               <a:t>Answer it.</a:t>
-            </a:r>
-          </a:p>
-        </p:txBody>
-      </p:sp>
-      <p:sp>
-        <p:nvSpPr>
-          <p:cNvPr id="17" name="TextBox 16"/>
-          <p:cNvSpPr txBox="1"/>
-          <p:nvPr/>
-        </p:nvSpPr>
-        <p:spPr>
-          <a:xfrm>
-            <a:off x="777240" y="4828032"/>
-            <a:ext cx="10607040" cy="365760"/>
-          </a:xfrm>
-          <a:prstGeom prst="rect">
-            <a:avLst/>
-          </a:prstGeom>
-          <a:noFill/>
-        </p:spPr>
-        <p:txBody>
-          <a:bodyPr wrap="square" lIns="45720" rIns="45720" tIns="18288" bIns="18288" anchor="t">
-            <a:spAutoFit/>
-          </a:bodyPr>
-          <a:lstStyle/>
-          <a:p>
-            <a:pPr algn="ctr"/>
-            <a:r>
-              <a:rPr sz="1900" b="0" i="1">
-                <a:solidFill>
-                  <a:srgbClr val="6B6B6B"/>
-                </a:solidFill>
-                <a:latin typeface="Century Schoolbook"/>
-              </a:rPr>
-              <a:t>Same power.</a:t>
             </a:r>
           </a:p>
         </p:txBody>
@@ -6981,8 +6946,8 @@
         </p:nvSpPr>
         <p:spPr>
           <a:xfrm>
-            <a:off x="2528251" y="2080260"/>
-            <a:ext cx="2827724" cy="457200"/>
+            <a:off x="1234440" y="1851660"/>
+            <a:ext cx="2626425" cy="457200"/>
           </a:xfrm>
           <a:prstGeom prst="rect">
             <a:avLst/>
@@ -6997,7 +6962,7 @@
           <a:p>
             <a:pPr algn="l"/>
             <a:r>
-              <a:rPr sz="2600" b="0" i="0">
+              <a:rPr sz="2400" b="0" i="0">
                 <a:solidFill>
                   <a:srgbClr val="1A1A1A"/>
                 </a:solidFill>
@@ -7010,7 +6975,7 @@
       </p:sp>
       <p:pic>
         <p:nvPicPr>
-          <p:cNvPr id="10" name="Picture 9" descr="2964bfefdede6eab.png"/>
+          <p:cNvPr id="10" name="Picture 9" descr="6c4bcb516da5e5c0.png"/>
           <p:cNvPicPr>
             <a:picLocks noChangeAspect="1"/>
           </p:cNvPicPr>
@@ -7024,8 +6989,8 @@
         </p:blipFill>
         <p:spPr>
           <a:xfrm>
-            <a:off x="5218815" y="2132076"/>
-            <a:ext cx="1429512" cy="353568"/>
+            <a:off x="3723705" y="1938527"/>
+            <a:ext cx="1164336" cy="283464"/>
           </a:xfrm>
           <a:prstGeom prst="rect">
             <a:avLst/>
@@ -7040,8 +7005,8 @@
         </p:nvSpPr>
         <p:spPr>
           <a:xfrm>
-            <a:off x="6648327" y="2080260"/>
-            <a:ext cx="3122100" cy="457200"/>
+            <a:off x="4888041" y="1851660"/>
+            <a:ext cx="2897979" cy="457200"/>
           </a:xfrm>
           <a:prstGeom prst="rect">
             <a:avLst/>
@@ -7056,7 +7021,7 @@
           <a:p>
             <a:pPr algn="l"/>
             <a:r>
-              <a:rPr sz="2600" b="0" i="0">
+              <a:rPr sz="2400" b="0" i="0">
                 <a:solidFill>
                   <a:srgbClr val="1A1A1A"/>
                 </a:solidFill>
@@ -7075,8 +7040,8 @@
         </p:nvSpPr>
         <p:spPr>
           <a:xfrm>
-            <a:off x="1567529" y="2766060"/>
-            <a:ext cx="1014298" cy="457200"/>
+            <a:off x="1234440" y="2464308"/>
+            <a:ext cx="952457" cy="457200"/>
           </a:xfrm>
           <a:prstGeom prst="rect">
             <a:avLst/>
@@ -7091,7 +7056,7 @@
           <a:p>
             <a:pPr algn="l"/>
             <a:r>
-              <a:rPr sz="2600" b="0" i="0">
+              <a:rPr sz="2400" b="0" i="0">
                 <a:solidFill>
                   <a:srgbClr val="1A1A1A"/>
                 </a:solidFill>
@@ -7104,7 +7069,7 @@
       </p:sp>
       <p:pic>
         <p:nvPicPr>
-          <p:cNvPr id="13" name="Picture 12" descr="c6d077b225e06ab4.png"/>
+          <p:cNvPr id="13" name="Picture 12" descr="959b0ab7310b422a.png"/>
           <p:cNvPicPr>
             <a:picLocks noChangeAspect="1"/>
           </p:cNvPicPr>
@@ -7118,8 +7083,8 @@
         </p:blipFill>
         <p:spPr>
           <a:xfrm>
-            <a:off x="2444668" y="2817876"/>
-            <a:ext cx="1420368" cy="353568"/>
+            <a:off x="2049737" y="2551176"/>
+            <a:ext cx="1155192" cy="283464"/>
           </a:xfrm>
           <a:prstGeom prst="rect">
             <a:avLst/>
@@ -7134,8 +7099,8 @@
         </p:nvSpPr>
         <p:spPr>
           <a:xfrm>
-            <a:off x="3865036" y="2766060"/>
-            <a:ext cx="6866114" cy="457200"/>
+            <a:off x="3204929" y="2464308"/>
+            <a:ext cx="6354084" cy="457200"/>
           </a:xfrm>
           <a:prstGeom prst="rect">
             <a:avLst/>
@@ -7150,7 +7115,7 @@
           <a:p>
             <a:pPr algn="l"/>
             <a:r>
-              <a:rPr sz="2600" b="0" i="0">
+              <a:rPr sz="2400" b="0" i="0">
                 <a:solidFill>
                   <a:srgbClr val="1A1A1A"/>
                 </a:solidFill>
@@ -7169,8 +7134,43 @@
         </p:nvSpPr>
         <p:spPr>
           <a:xfrm>
-            <a:off x="777240" y="3474720"/>
-            <a:ext cx="10607040" cy="465151"/>
+            <a:off x="1234440" y="3099816"/>
+            <a:ext cx="10058400" cy="429370"/>
+          </a:xfrm>
+          <a:prstGeom prst="rect">
+            <a:avLst/>
+          </a:prstGeom>
+          <a:noFill/>
+        </p:spPr>
+        <p:txBody>
+          <a:bodyPr wrap="square" lIns="45720" rIns="45720" tIns="18288" bIns="18288" anchor="t">
+            <a:spAutoFit/>
+          </a:bodyPr>
+          <a:lstStyle/>
+          <a:p>
+            <a:pPr algn="l"/>
+            <a:r>
+              <a:rPr sz="2400" b="1" i="0">
+                <a:solidFill>
+                  <a:srgbClr val="1A1A1A"/>
+                </a:solidFill>
+                <a:latin typeface="Century Schoolbook"/>
+              </a:rPr>
+              <a:t>How many tickets were sold on the two days?</a:t>
+            </a:r>
+          </a:p>
+        </p:txBody>
+      </p:sp>
+      <p:sp>
+        <p:nvSpPr>
+          <p:cNvPr id="16" name="TextBox 15"/>
+          <p:cNvSpPr txBox="1"/>
+          <p:nvPr/>
+        </p:nvSpPr>
+        <p:spPr>
+          <a:xfrm>
+            <a:off x="1828800" y="3730354"/>
+            <a:ext cx="8503920" cy="548640"/>
           </a:xfrm>
           <a:prstGeom prst="rect">
             <a:avLst/>
@@ -7185,41 +7185,6 @@
           <a:p>
             <a:pPr algn="ctr"/>
             <a:r>
-              <a:rPr sz="2600" b="0" i="0">
-                <a:solidFill>
-                  <a:srgbClr val="1A1A1A"/>
-                </a:solidFill>
-                <a:latin typeface="Century Schoolbook"/>
-              </a:rPr>
-              <a:t>How many tickets were sold on the two days?</a:t>
-            </a:r>
-          </a:p>
-        </p:txBody>
-      </p:sp>
-      <p:sp>
-        <p:nvSpPr>
-          <p:cNvPr id="16" name="TextBox 15"/>
-          <p:cNvSpPr txBox="1"/>
-          <p:nvPr/>
-        </p:nvSpPr>
-        <p:spPr>
-          <a:xfrm>
-            <a:off x="1828800" y="4095319"/>
-            <a:ext cx="8503920" cy="548640"/>
-          </a:xfrm>
-          <a:prstGeom prst="rect">
-            <a:avLst/>
-          </a:prstGeom>
-          <a:noFill/>
-        </p:spPr>
-        <p:txBody>
-          <a:bodyPr wrap="square" lIns="45720" rIns="45720" tIns="18288" bIns="18288" anchor="t">
-            <a:spAutoFit/>
-          </a:bodyPr>
-          <a:lstStyle/>
-          <a:p>
-            <a:pPr algn="ctr"/>
-            <a:r>
               <a:rPr sz="2400" b="0" i="0">
                 <a:solidFill>
                   <a:srgbClr val="6B6B6B"/>
@@ -7239,7 +7204,7 @@
         </p:nvSpPr>
         <p:spPr>
           <a:xfrm>
-            <a:off x="777240" y="4826839"/>
+            <a:off x="777240" y="4663440"/>
             <a:ext cx="10607040" cy="548640"/>
           </a:xfrm>
           <a:prstGeom prst="rect">

--- a/a7/build/out/u4/A7 4.01  Slides.pptx
+++ b/a7/build/out/u4/A7 4.01  Slides.pptx
@@ -3442,7 +3442,7 @@
                 </a:solidFill>
                 <a:latin typeface="Century Schoolbook"/>
               </a:rPr>
-              <a:t>Today you put two of them together — and the powers of ten have to match first.</a:t>
+              <a:t>Today you add and subtract them — the powers must match.</a:t>
             </a:r>
           </a:p>
         </p:txBody>
